--- a/deck/Iron-preseed-Fulgur.pptx
+++ b/deck/Iron-preseed-Fulgur.pptx
@@ -3400,7 +3400,7 @@
                 <a:ea typeface="Cambria" pitchFamily="34" charset="-122"/>
                 <a:cs typeface="Cambria" pitchFamily="34" charset="-120"/>
               </a:rPr>
-              <a:t>A real need with no trustworthy home</a:t>
+              <a:t>Credit stopped innovating and started extracting</a:t>
             </a:r>
             <a:endParaRPr lang="en-US" sz="2900" dirty="0"/>
           </a:p>
@@ -3414,7 +3414,7 @@
         </p:nvSpPr>
         <p:spPr>
           <a:xfrm>
-            <a:off x="502920" y="2286000"/>
+            <a:off x="502920" y="2212848"/>
             <a:ext cx="457200" cy="548640"/>
           </a:xfrm>
           <a:prstGeom prst="rect">
@@ -3453,7 +3453,7 @@
         </p:nvSpPr>
         <p:spPr>
           <a:xfrm>
-            <a:off x="1005840" y="2267712"/>
+            <a:off x="1005840" y="2194560"/>
             <a:ext cx="4297680" cy="777240"/>
           </a:xfrm>
           <a:prstGeom prst="rect">
@@ -3481,7 +3481,7 @@
                 <a:ea typeface="Calibri" pitchFamily="34" charset="-122"/>
                 <a:cs typeface="Calibri" pitchFamily="34" charset="-120"/>
               </a:rPr>
-              <a:t>Asset-rich, cash-poor by choice</a:t>
+              <a:t>Credit became extraction</a:t>
             </a:r>
             <a:endParaRPr lang="en-US" sz="1500" dirty="0"/>
           </a:p>
@@ -3501,7 +3501,7 @@
                 <a:ea typeface="Calibri" pitchFamily="34" charset="-122"/>
                 <a:cs typeface="Calibri" pitchFamily="34" charset="-120"/>
               </a:rPr>
-              <a:t>Selling bitcoin is a taxable event and gives up the upside. Holders want dollars, not a sale.</a:t>
+              <a:t>The industry solved credit decades ago, then perfected the squeeze: 20 to 30% APR, minimums so the balance never dies.</a:t>
             </a:r>
             <a:endParaRPr lang="en-US" sz="1500" dirty="0"/>
           </a:p>
@@ -3515,7 +3515,7 @@
         </p:nvSpPr>
         <p:spPr>
           <a:xfrm>
-            <a:off x="502920" y="3127248"/>
+            <a:off x="502920" y="3035808"/>
             <a:ext cx="457200" cy="548640"/>
           </a:xfrm>
           <a:prstGeom prst="rect">
@@ -3554,7 +3554,7 @@
         </p:nvSpPr>
         <p:spPr>
           <a:xfrm>
-            <a:off x="1005840" y="3108960"/>
+            <a:off x="1005840" y="3017520"/>
             <a:ext cx="4297680" cy="777240"/>
           </a:xfrm>
           <a:prstGeom prst="rect">
@@ -3582,7 +3582,7 @@
                 <a:ea typeface="Calibri" pitchFamily="34" charset="-122"/>
                 <a:cs typeface="Calibri" pitchFamily="34" charset="-120"/>
               </a:rPr>
-              <a:t>Billions the banks reject</a:t>
+              <a:t>Squeezed from the other side</a:t>
             </a:r>
             <a:endParaRPr lang="en-US" sz="1500" dirty="0"/>
           </a:p>
@@ -3602,7 +3602,7 @@
                 <a:ea typeface="Calibri" pitchFamily="34" charset="-122"/>
                 <a:cs typeface="Calibri" pitchFamily="34" charset="-120"/>
               </a:rPr>
-              <a:t>No credit file, the wrong country, no history. Their bitcoin is the qualification banks ignore.</a:t>
+              <a:t>Bitcoiners are asset-rich and cash-poor by choice. Selling is a taxable event and gives up the upside.</a:t>
             </a:r>
             <a:endParaRPr lang="en-US" sz="1500" dirty="0"/>
           </a:p>
@@ -3616,7 +3616,7 @@
         </p:nvSpPr>
         <p:spPr>
           <a:xfrm>
-            <a:off x="502920" y="3968496"/>
+            <a:off x="502920" y="3858768"/>
             <a:ext cx="457200" cy="548640"/>
           </a:xfrm>
           <a:prstGeom prst="rect">
@@ -3655,7 +3655,7 @@
         </p:nvSpPr>
         <p:spPr>
           <a:xfrm>
-            <a:off x="1005840" y="3950208"/>
+            <a:off x="1005840" y="3840480"/>
             <a:ext cx="4297680" cy="777240"/>
           </a:xfrm>
           <a:prstGeom prst="rect">
@@ -3683,7 +3683,7 @@
                 <a:ea typeface="Calibri" pitchFamily="34" charset="-122"/>
                 <a:cs typeface="Calibri" pitchFamily="34" charset="-120"/>
               </a:rPr>
-              <a:t>Every existing option is a trap</a:t>
+              <a:t>Rejected, or trapped</a:t>
             </a:r>
             <a:endParaRPr lang="en-US" sz="1500" dirty="0"/>
           </a:p>
@@ -3703,7 +3703,7 @@
                 <a:ea typeface="Calibri" pitchFamily="34" charset="-122"/>
                 <a:cs typeface="Calibri" pitchFamily="34" charset="-120"/>
               </a:rPr>
-              <a:t>Custodial, opaque, or region-locked. Celsius and BlockFi blew up rehypothecating customer funds.</a:t>
+              <a:t>No credit file means no. Every bitcoin-backed option is custodial or opaque: Celsius and BlockFi rehypothecated.</a:t>
             </a:r>
             <a:endParaRPr lang="en-US" sz="1500" dirty="0"/>
           </a:p>
@@ -3717,7 +3717,7 @@
         </p:nvSpPr>
         <p:spPr>
           <a:xfrm>
-            <a:off x="5623560" y="2286000"/>
+            <a:off x="5623560" y="2212848"/>
             <a:ext cx="3017520" cy="2148840"/>
           </a:xfrm>
           <a:prstGeom prst="roundRect">
@@ -3751,7 +3751,7 @@
         </p:nvSpPr>
         <p:spPr>
           <a:xfrm>
-            <a:off x="5897880" y="2487168"/>
+            <a:off x="5897880" y="2414016"/>
             <a:ext cx="2560320" cy="274320"/>
           </a:xfrm>
           <a:prstGeom prst="rect">
@@ -3790,7 +3790,7 @@
         </p:nvSpPr>
         <p:spPr>
           <a:xfrm>
-            <a:off x="5897880" y="2852928"/>
+            <a:off x="5897880" y="2779776"/>
             <a:ext cx="2560320" cy="914400"/>
           </a:xfrm>
           <a:prstGeom prst="rect">
@@ -3872,7 +3872,7 @@
         </p:nvSpPr>
         <p:spPr>
           <a:xfrm>
-            <a:off x="5897880" y="3840480"/>
+            <a:off x="5897880" y="3767328"/>
             <a:ext cx="2514600" cy="548640"/>
           </a:xfrm>
           <a:prstGeom prst="rect">

--- a/deck/Iron-preseed-Fulgur.pptx
+++ b/deck/Iron-preseed-Fulgur.pptx
@@ -5970,7 +5970,7 @@
                 <a:ea typeface="Calibri" pitchFamily="34" charset="-122"/>
                 <a:cs typeface="Calibri" pitchFamily="34" charset="-120"/>
               </a:rPr>
-              <a:t>A non-custodial bitcoin credit line plus a card and local-rail spend layer in emerging markets. Ledn and Coinbase lend, but they do not put a spendable card in your pocket in Manila.</a:t>
+              <a:t>A non-custodial credit line plus a card and local-rail spend layer. Ledn and Coinbase lend; neither hands you a spendable card.</a:t>
             </a:r>
             <a:endParaRPr lang="en-US" sz="1150" dirty="0"/>
           </a:p>
